--- a/Schools_ML_Track/camp_2026/slides/ML/ML06.pptx
+++ b/Schools_ML_Track/camp_2026/slides/ML/ML06.pptx
@@ -129,7 +129,7 @@
   <p:extLst>
     <p:ext uri="{521415D9-36F7-43E2-AB2F-B90AF26B5E84}">
       <p14:sectionLst xmlns:p14="http://schemas.microsoft.com/office/powerpoint/2010/main">
-        <p14:section name="Opening" id="{107a70cf-8ded-619d-4c96-9dda088ca60a}">
+        <p14:section name="Opening" id="{5047192e-4af5-4ff9-7ff0-0758a7f7ff53}">
           <p14:sldIdLst>
             <p14:sldId id="256"/>
             <p14:sldId id="257"/>
@@ -140,7 +140,7 @@
             <p14:sldId id="262"/>
           </p14:sldIdLst>
         </p14:section>
-        <p14:section name="Block A" id="{d1ce21bf-a96a-d768-3052-db0ed4d425d9}">
+        <p14:section name="Block A" id="{874b1d07-3b4a-d6e5-a12d-48275b937efd}">
           <p14:sldIdLst>
             <p14:sldId id="263"/>
             <p14:sldId id="264"/>
@@ -150,15 +150,15 @@
             <p14:sldId id="269"/>
           </p14:sldIdLst>
         </p14:section>
-        <p14:section name="Break" id="{9ff7362a-c1a5-53b3-fb9c-96e32bcb5f10}">
+        <p14:section name="Break" id="{f4c0ef1b-756f-a013-cfdf-a25b00234e9c}">
           <p14:sldIdLst>
             <p14:sldId id="267"/>
           </p14:sldIdLst>
         </p14:section>
-        <p14:section name="Block A" id="{f8cd39c6-1b64-94fa-f846-607462310faf}">
+        <p14:section name="Block A" id="{a9398caf-d4f2-0723-c962-7d8485ee9029}">
           <p14:sldIdLst/>
         </p14:section>
-        <p14:section name="Block B" id="{5c688c6a-72ca-4a2c-d95d-a0a38dd4a708}">
+        <p14:section name="Block B" id="{3ae45fdd-8035-2780-5e38-9c8d203d0e6b}">
           <p14:sldIdLst>
             <p14:sldId id="270"/>
             <p14:sldId id="271"/>
@@ -168,7 +168,7 @@
             <p14:sldId id="275"/>
           </p14:sldIdLst>
         </p14:section>
-        <p14:section name="Make and close" id="{86d12140-4210-2732-925b-9a99b38232e6}">
+        <p14:section name="Make and close" id="{7f767d7f-46c4-3a31-de5a-e8fe9e4fe757}">
           <p14:sldIdLst>
             <p14:sldId id="276"/>
             <p14:sldId id="277"/>

--- a/Schools_ML_Track/camp_2026/slides/ML/ML06.pptx
+++ b/Schools_ML_Track/camp_2026/slides/ML/ML06.pptx
@@ -129,7 +129,7 @@
   <p:extLst>
     <p:ext uri="{521415D9-36F7-43E2-AB2F-B90AF26B5E84}">
       <p14:sectionLst xmlns:p14="http://schemas.microsoft.com/office/powerpoint/2010/main">
-        <p14:section name="Opening" id="{5047192e-4af5-4ff9-7ff0-0758a7f7ff53}">
+        <p14:section name="Opening" id="{0ceecf87-8730-a7bc-0f5f-2559cd8c666b}">
           <p14:sldIdLst>
             <p14:sldId id="256"/>
             <p14:sldId id="257"/>
@@ -140,7 +140,7 @@
             <p14:sldId id="262"/>
           </p14:sldIdLst>
         </p14:section>
-        <p14:section name="Block A" id="{874b1d07-3b4a-d6e5-a12d-48275b937efd}">
+        <p14:section name="Block A" id="{994d1d0f-bc0d-dff1-4415-b5e61cff35cc}">
           <p14:sldIdLst>
             <p14:sldId id="263"/>
             <p14:sldId id="264"/>
@@ -150,15 +150,15 @@
             <p14:sldId id="269"/>
           </p14:sldIdLst>
         </p14:section>
-        <p14:section name="Break" id="{f4c0ef1b-756f-a013-cfdf-a25b00234e9c}">
+        <p14:section name="Break" id="{0ed68bcd-18dd-26ba-a98b-e6042206d6a9}">
           <p14:sldIdLst>
             <p14:sldId id="267"/>
           </p14:sldIdLst>
         </p14:section>
-        <p14:section name="Block A" id="{a9398caf-d4f2-0723-c962-7d8485ee9029}">
+        <p14:section name="Block A" id="{4b5fc294-52dc-fe24-5bf4-e2484be416ea}">
           <p14:sldIdLst/>
         </p14:section>
-        <p14:section name="Block B" id="{3ae45fdd-8035-2780-5e38-9c8d203d0e6b}">
+        <p14:section name="Block B" id="{534ef5f5-f0a3-00da-2001-468f685ffa8f}">
           <p14:sldIdLst>
             <p14:sldId id="270"/>
             <p14:sldId id="271"/>
@@ -168,7 +168,7 @@
             <p14:sldId id="275"/>
           </p14:sldIdLst>
         </p14:section>
-        <p14:section name="Make and close" id="{7f767d7f-46c4-3a31-de5a-e8fe9e4fe757}">
+        <p14:section name="Make and close" id="{83573719-543c-8fcd-74f8-4756ee34a678}">
           <p14:sldIdLst>
             <p14:sldId id="276"/>
             <p14:sldId id="277"/>
@@ -3288,7 +3288,24 @@
                 <a:ea typeface="Lato" pitchFamily="34" charset="-122"/>
                 <a:cs typeface="Lato" pitchFamily="34" charset="-120"/>
               </a:rPr>
-              <a:t>Functions and checks that fail loudly</a:t>
+              <a:t>Functions and checks</a:t>
+            </a:r>
+            <a:endParaRPr lang="en-US" sz="5600" dirty="0"/>
+          </a:p>
+          <a:p>
+            <a:pPr algn="l" indent="0" marL="0">
+              <a:buNone/>
+            </a:pPr>
+            <a:r>
+              <a:rPr lang="en-US" sz="5600" b="1" dirty="0">
+                <a:solidFill>
+                  <a:srgbClr val="FFFFFF"/>
+                </a:solidFill>
+                <a:latin typeface="Lato" pitchFamily="34" charset="0"/>
+                <a:ea typeface="Lato" pitchFamily="34" charset="-122"/>
+                <a:cs typeface="Lato" pitchFamily="34" charset="-120"/>
+              </a:rPr>
+              <a:t>that fail loudly</a:t>
             </a:r>
             <a:endParaRPr lang="en-US" sz="5600" dirty="0"/>
           </a:p>
@@ -3464,248 +3481,40 @@
           </a:p>
         </p:txBody>
       </p:sp>
-      <p:sp>
-        <p:nvSpPr>
-          <p:cNvPr id="3" name="Shape 1"/>
-          <p:cNvSpPr/>
+      <p:pic>
+        <p:nvPicPr>
+          <p:cNvPr id="3" name="Image 0" descr="Look closely">    </p:cNvPr>
+          <p:cNvPicPr>
+            <a:picLocks noChangeAspect="1"/>
+          </p:cNvPicPr>
           <p:nvPr/>
-        </p:nvSpPr>
-        <p:spPr>
-          <a:xfrm>
-            <a:off x="7498080" y="1737360"/>
-            <a:ext cx="4023360" cy="1924812"/>
-          </a:xfrm>
-          <a:prstGeom prst="roundRect">
-            <a:avLst>
-              <a:gd name="adj" fmla="val 3800"/>
-            </a:avLst>
-          </a:prstGeom>
-          <a:solidFill>
-            <a:srgbClr val="111111"/>
-          </a:solidFill>
-          <a:ln/>
-        </p:spPr>
-      </p:sp>
-      <p:sp>
-        <p:nvSpPr>
-          <p:cNvPr id="4" name="Text 2"/>
+        </p:nvPicPr>
+        <p:blipFill>
+          <a:blip r:embed="rId1"/>
+          <a:stretch>
+            <a:fillRect/>
+          </a:stretch>
+        </p:blipFill>
+        <p:spPr>
+          <a:xfrm>
+            <a:off x="9875520" y="4480560"/>
+            <a:ext cx="1645920" cy="1645920"/>
+          </a:xfrm>
+          <a:prstGeom prst="rect">
+            <a:avLst/>
+          </a:prstGeom>
+        </p:spPr>
+      </p:pic>
+      <p:sp>
+        <p:nvSpPr>
+          <p:cNvPr id="4" name="Text 1"/>
           <p:cNvSpPr txBox="1"/>
           <p:nvPr/>
         </p:nvSpPr>
         <p:spPr>
           <a:xfrm>
-            <a:off x="7699248" y="1938528"/>
-            <a:ext cx="3621024" cy="1522476"/>
-          </a:xfrm>
-          <a:prstGeom prst="rect">
-            <a:avLst/>
-          </a:prstGeom>
-          <a:noFill/>
-          <a:ln/>
-        </p:spPr>
-        <p:txBody>
-          <a:bodyPr wrap="square" lIns="0" tIns="0" rIns="0" bIns="0" rtlCol="0" anchor="t"/>
-          <a:lstStyle/>
-          <a:p>
-            <a:pPr algn="l" indent="0" marL="0">
-              <a:lnSpc>
-                <a:spcPts val="1950"/>
-              </a:lnSpc>
-              <a:buNone/>
-            </a:pPr>
-            <a:r>
-              <a:rPr lang="en-US" sz="1500" b="1" dirty="0">
-                <a:solidFill>
-                  <a:srgbClr val="FFFFFF"/>
-                </a:solidFill>
-                <a:latin typeface="Courier New" pitchFamily="34" charset="0"/>
-                <a:ea typeface="Courier New" pitchFamily="34" charset="-122"/>
-                <a:cs typeface="Courier New" pitchFamily="34" charset="-120"/>
-              </a:rPr>
-              <a:t>def</a:t>
-            </a:r>
-            <a:pPr algn="l" indent="0" marL="0">
-              <a:lnSpc>
-                <a:spcPts val="1950"/>
-              </a:lnSpc>
-              <a:buNone/>
-            </a:pPr>
-            <a:r>
-              <a:rPr lang="en-US" sz="1500" dirty="0">
-                <a:solidFill>
-                  <a:srgbClr val="FFFFFF"/>
-                </a:solidFill>
-                <a:latin typeface="Courier New" pitchFamily="34" charset="0"/>
-                <a:ea typeface="Courier New" pitchFamily="34" charset="-122"/>
-                <a:cs typeface="Courier New" pitchFamily="34" charset="-120"/>
-              </a:rPr>
-              <a:t> total(price, quantity):</a:t>
-            </a:r>
-            <a:endParaRPr lang="en-US" sz="1500" dirty="0"/>
-          </a:p>
-          <a:p>
-            <a:pPr algn="l" indent="0" marL="0">
-              <a:lnSpc>
-                <a:spcPts val="1950"/>
-              </a:lnSpc>
-              <a:buNone/>
-            </a:pPr>
-            <a:r>
-              <a:rPr lang="en-US" sz="1500" dirty="0">
-                <a:solidFill>
-                  <a:srgbClr val="FFFFFF"/>
-                </a:solidFill>
-                <a:latin typeface="Courier New" pitchFamily="34" charset="0"/>
-                <a:ea typeface="Courier New" pitchFamily="34" charset="-122"/>
-                <a:cs typeface="Courier New" pitchFamily="34" charset="-120"/>
-              </a:rPr>
-              <a:t>    </a:t>
-            </a:r>
-            <a:pPr algn="l" indent="0" marL="0">
-              <a:lnSpc>
-                <a:spcPts val="1950"/>
-              </a:lnSpc>
-              <a:buNone/>
-            </a:pPr>
-            <a:r>
-              <a:rPr lang="en-US" sz="1500" b="1" dirty="0">
-                <a:solidFill>
-                  <a:srgbClr val="FFFFFF"/>
-                </a:solidFill>
-                <a:latin typeface="Courier New" pitchFamily="34" charset="0"/>
-                <a:ea typeface="Courier New" pitchFamily="34" charset="-122"/>
-                <a:cs typeface="Courier New" pitchFamily="34" charset="-120"/>
-              </a:rPr>
-              <a:t>return</a:t>
-            </a:r>
-            <a:pPr algn="l" indent="0" marL="0">
-              <a:lnSpc>
-                <a:spcPts val="1950"/>
-              </a:lnSpc>
-              <a:buNone/>
-            </a:pPr>
-            <a:r>
-              <a:rPr lang="en-US" sz="1500" dirty="0">
-                <a:solidFill>
-                  <a:srgbClr val="FFFFFF"/>
-                </a:solidFill>
-                <a:latin typeface="Courier New" pitchFamily="34" charset="0"/>
-                <a:ea typeface="Courier New" pitchFamily="34" charset="-122"/>
-                <a:cs typeface="Courier New" pitchFamily="34" charset="-120"/>
-              </a:rPr>
-              <a:t> price * quantity</a:t>
-            </a:r>
-            <a:endParaRPr lang="en-US" sz="1500" dirty="0"/>
-          </a:p>
-          <a:p>
-            <a:pPr algn="l" indent="0" marL="0">
-              <a:lnSpc>
-                <a:spcPts val="1950"/>
-              </a:lnSpc>
-              <a:buNone/>
-            </a:pPr>
-            <a:r>
-              <a:rPr lang="en-US" sz="1500" dirty="0">
-                <a:solidFill>
-                  <a:srgbClr val="FFFFFF"/>
-                </a:solidFill>
-                <a:latin typeface="Courier New" pitchFamily="34" charset="0"/>
-                <a:ea typeface="Courier New" pitchFamily="34" charset="-122"/>
-                <a:cs typeface="Courier New" pitchFamily="34" charset="-120"/>
-              </a:rPr>
-              <a:t> </a:t>
-            </a:r>
-            <a:endParaRPr lang="en-US" sz="1500" dirty="0"/>
-          </a:p>
-          <a:p>
-            <a:pPr algn="l" indent="0" marL="0">
-              <a:lnSpc>
-                <a:spcPts val="1950"/>
-              </a:lnSpc>
-              <a:buNone/>
-            </a:pPr>
-            <a:r>
-              <a:rPr lang="en-US" sz="1500" dirty="0">
-                <a:solidFill>
-                  <a:srgbClr val="FFFFFF"/>
-                </a:solidFill>
-                <a:latin typeface="Courier New" pitchFamily="34" charset="0"/>
-                <a:ea typeface="Courier New" pitchFamily="34" charset="-122"/>
-                <a:cs typeface="Courier New" pitchFamily="34" charset="-120"/>
-              </a:rPr>
-              <a:t>result = total(2000, 3)</a:t>
-            </a:r>
-            <a:endParaRPr lang="en-US" sz="1500" dirty="0"/>
-          </a:p>
-          <a:p>
-            <a:pPr algn="l" indent="0" marL="0">
-              <a:lnSpc>
-                <a:spcPts val="1950"/>
-              </a:lnSpc>
-              <a:buNone/>
-            </a:pPr>
-            <a:r>
-              <a:rPr lang="en-US" sz="1500" dirty="0">
-                <a:solidFill>
-                  <a:srgbClr val="FFFFFF"/>
-                </a:solidFill>
-                <a:latin typeface="Courier New" pitchFamily="34" charset="0"/>
-                <a:ea typeface="Courier New" pitchFamily="34" charset="-122"/>
-                <a:cs typeface="Courier New" pitchFamily="34" charset="-120"/>
-              </a:rPr>
-              <a:t>print(result)</a:t>
-            </a:r>
-            <a:endParaRPr lang="en-US" sz="1500" dirty="0"/>
-          </a:p>
-          <a:p>
-            <a:pPr algn="l" indent="0" marL="0">
-              <a:lnSpc>
-                <a:spcPts val="1950"/>
-              </a:lnSpc>
-              <a:buNone/>
-            </a:pPr>
-            <a:r>
-              <a:rPr lang="en-US" sz="1500" b="1" dirty="0">
-                <a:solidFill>
-                  <a:srgbClr val="FFFFFF"/>
-                </a:solidFill>
-                <a:latin typeface="Courier New" pitchFamily="34" charset="0"/>
-                <a:ea typeface="Courier New" pitchFamily="34" charset="-122"/>
-                <a:cs typeface="Courier New" pitchFamily="34" charset="-120"/>
-              </a:rPr>
-              <a:t>assert</a:t>
-            </a:r>
-            <a:pPr algn="l" indent="0" marL="0">
-              <a:lnSpc>
-                <a:spcPts val="1950"/>
-              </a:lnSpc>
-              <a:buNone/>
-            </a:pPr>
-            <a:r>
-              <a:rPr lang="en-US" sz="1500" dirty="0">
-                <a:solidFill>
-                  <a:srgbClr val="FFFFFF"/>
-                </a:solidFill>
-                <a:latin typeface="Courier New" pitchFamily="34" charset="0"/>
-                <a:ea typeface="Courier New" pitchFamily="34" charset="-122"/>
-                <a:cs typeface="Courier New" pitchFamily="34" charset="-120"/>
-              </a:rPr>
-              <a:t> total(2000, 3) == 6000</a:t>
-            </a:r>
-            <a:endParaRPr lang="en-US" sz="1500" dirty="0"/>
-          </a:p>
-        </p:txBody>
-      </p:sp>
-      <p:sp>
-        <p:nvSpPr>
-          <p:cNvPr id="5" name="Text 3"/>
-          <p:cNvSpPr txBox="1"/>
-          <p:nvPr/>
-        </p:nvSpPr>
-        <p:spPr>
-          <a:xfrm>
             <a:off x="640080" y="1737360"/>
-            <a:ext cx="6400800" cy="4389120"/>
+            <a:ext cx="8961120" cy="4389120"/>
           </a:xfrm>
           <a:prstGeom prst="rect">
             <a:avLst/>
@@ -6460,15 +6269,15 @@
           <a:p>
             <a:pPr algn="l" indent="0" marL="0">
               <a:lnSpc>
-                <a:spcPts val="3600"/>
+                <a:spcPts val="3360"/>
               </a:lnSpc>
               <a:spcAft>
-                <a:spcPts val="2520"/>
+                <a:spcPts val="2020"/>
               </a:spcAft>
               <a:buNone/>
             </a:pPr>
             <a:r>
-              <a:rPr lang="en-US" sz="3000" dirty="0">
+              <a:rPr lang="en-US" sz="2800" dirty="0">
                 <a:solidFill>
                   <a:srgbClr val="111111"/>
                 </a:solidFill>
@@ -6476,22 +6285,22 @@
                 <a:ea typeface="Lato" pitchFamily="34" charset="-122"/>
                 <a:cs typeface="Lato" pitchFamily="34" charset="-120"/>
               </a:rPr>
-              <a:t>Define double(number) so it returns twice its input. Check double(4), double(0) and double(-2) with assert. Save the notebook and run all cells from the top.</a:t>
-            </a:r>
-            <a:endParaRPr lang="en-US" sz="3000" dirty="0"/>
+              <a:t>Define double(number) so it returns twice its input.</a:t>
+            </a:r>
+            <a:endParaRPr lang="en-US" sz="2800" dirty="0"/>
           </a:p>
           <a:p>
             <a:pPr algn="l" indent="0" marL="0">
               <a:lnSpc>
-                <a:spcPts val="3600"/>
+                <a:spcPts val="3360"/>
               </a:lnSpc>
               <a:spcAft>
-                <a:spcPts val="2520"/>
+                <a:spcPts val="2020"/>
               </a:spcAft>
               <a:buNone/>
             </a:pPr>
             <a:r>
-              <a:rPr lang="en-US" sz="3000" dirty="0">
+              <a:rPr lang="en-US" sz="2800" dirty="0">
                 <a:solidFill>
                   <a:srgbClr val="111111"/>
                 </a:solidFill>
@@ -6499,9 +6308,55 @@
                 <a:ea typeface="Lato" pitchFamily="34" charset="-122"/>
                 <a:cs typeface="Lato" pitchFamily="34" charset="-120"/>
               </a:rPr>
-              <a:t>Save it as ML06. Write two sentences: what you changed and how you checked it.</a:t>
-            </a:r>
-            <a:endParaRPr lang="en-US" sz="3000" dirty="0"/>
+              <a:t>Check double(4), double(0) and double(-2) with assert.</a:t>
+            </a:r>
+            <a:endParaRPr lang="en-US" sz="2800" dirty="0"/>
+          </a:p>
+          <a:p>
+            <a:pPr algn="l" indent="0" marL="0">
+              <a:lnSpc>
+                <a:spcPts val="3360"/>
+              </a:lnSpc>
+              <a:spcAft>
+                <a:spcPts val="2020"/>
+              </a:spcAft>
+              <a:buNone/>
+            </a:pPr>
+            <a:r>
+              <a:rPr lang="en-US" sz="2800" dirty="0">
+                <a:solidFill>
+                  <a:srgbClr val="111111"/>
+                </a:solidFill>
+                <a:latin typeface="Lato" pitchFamily="34" charset="0"/>
+                <a:ea typeface="Lato" pitchFamily="34" charset="-122"/>
+                <a:cs typeface="Lato" pitchFamily="34" charset="-120"/>
+              </a:rPr>
+              <a:t>Save the notebook and run all cells from the top.</a:t>
+            </a:r>
+            <a:endParaRPr lang="en-US" sz="2800" dirty="0"/>
+          </a:p>
+          <a:p>
+            <a:pPr algn="l" indent="0" marL="0">
+              <a:lnSpc>
+                <a:spcPts val="3360"/>
+              </a:lnSpc>
+              <a:spcAft>
+                <a:spcPts val="2020"/>
+              </a:spcAft>
+              <a:buNone/>
+            </a:pPr>
+            <a:r>
+              <a:rPr lang="en-US" sz="2800" dirty="0">
+                <a:solidFill>
+                  <a:srgbClr val="111111"/>
+                </a:solidFill>
+                <a:latin typeface="Lato" pitchFamily="34" charset="0"/>
+                <a:ea typeface="Lato" pitchFamily="34" charset="-122"/>
+                <a:cs typeface="Lato" pitchFamily="34" charset="-120"/>
+              </a:rPr>
+              <a:t>Write two sentences: what you changed and how you checked it.</a:t>
+            </a:r>
+            <a:endParaRPr lang="en-US" sz="2800" dirty="0"/>
           </a:p>
         </p:txBody>
       </p:sp>
